--- a/lectures/Lecture 8.2 - Continuous Integration.pptx
+++ b/lectures/Lecture 8.2 - Continuous Integration.pptx
@@ -1821,7 +1821,7 @@
             </a:pPr>
             <a:r>
               <a:rPr lang="en-US" dirty="0"/>
-              <a:t>The four-word vocabulary is really the scaffolding for every CI lecture or tutorial they'll ever read - memorize once, recognize forever. Reinforce the hierarchy out loud: events trigger workflows, workflows contain jobs, jobs contain steps...once that shape is in their heads the YAML on the next slide stops looking intimidating.</a:t>
+              <a:t>The four-word vocabulary is really the scaffolding for every CI lecture or tutorial they'll ever read, and it's worth memorizing once because they'll be recognizing it for years after this. Reinforce the hierarchy out loud: events trigger workflows, workflows contain jobs, jobs contain steps...once that shape is in their heads the YAML on the next slide stops looking intimidating.</a:t>
             </a:r>
             <a:endParaRPr dirty="0"/>
           </a:p>
@@ -1979,7 +1979,7 @@
             </a:pPr>
             <a:r>
               <a:rPr lang="en-US" dirty="0"/>
-              <a:t>The four-word vocabulary is really the scaffolding for every CI lecture or tutorial they'll ever read - memorize once, recognize forever. Reinforce the hierarchy out loud: events trigger workflows, workflows contain jobs, jobs contain steps...once that shape is in their heads the YAML on the next slide stops looking intimidating.</a:t>
+              <a:t>The four-word vocabulary is really the scaffolding for every CI lecture or tutorial they'll ever read, and it's worth memorizing once because they'll be recognizing it for years after this. Reinforce the hierarchy out loud: events trigger workflows, workflows contain jobs, jobs contain steps...once that shape is in their heads the YAML on the next slide stops looking intimidating.</a:t>
             </a:r>
             <a:endParaRPr dirty="0"/>
           </a:p>
@@ -2137,7 +2137,7 @@
             </a:pPr>
             <a:r>
               <a:rPr lang="en-US" dirty="0"/>
-              <a:t>The four-word vocabulary is really the scaffolding for every CI lecture or tutorial they'll ever read - memorize once, recognize forever. Reinforce the hierarchy out loud: events trigger workflows, workflows contain jobs, jobs contain steps...once that shape is in their heads the YAML on the next slide stops looking intimidating.</a:t>
+              <a:t>The four-word vocabulary is really the scaffolding for every CI lecture or tutorial they'll ever read, and it's worth memorizing once because they'll be recognizing it for years after this. Reinforce the hierarchy out loud: events trigger workflows, workflows contain jobs, jobs contain steps...once that shape is in their heads the YAML on the next slide stops looking intimidating.</a:t>
             </a:r>
             <a:endParaRPr dirty="0"/>
           </a:p>
@@ -2295,7 +2295,7 @@
             </a:pPr>
             <a:r>
               <a:rPr lang="en-US" dirty="0"/>
-              <a:t>The four-word vocabulary is really the scaffolding for every CI lecture or tutorial they'll ever read - memorize once, recognize forever. Reinforce the hierarchy out loud: events trigger workflows, workflows contain jobs, jobs contain steps...once that shape is in their heads the YAML on the next slide stops looking intimidating.</a:t>
+              <a:t>The four-word vocabulary is really the scaffolding for every CI lecture or tutorial they'll ever read, and it's worth memorizing once because they'll be recognizing it for years after this. Reinforce the hierarchy out loud: events trigger workflows, workflows contain jobs, jobs contain steps...once that shape is in their heads the YAML on the next slide stops looking intimidating.</a:t>
             </a:r>
             <a:endParaRPr dirty="0"/>
           </a:p>
@@ -2967,7 +2967,7 @@
             </a:pPr>
             <a:r>
               <a:rPr lang="en-US" dirty="0"/>
-              <a:t>Walking through the steps really makes 'CI' feel concrete instead of magical. It's not magic, it's a shell script running on a throwaway VM that GitHub provisions and tears down around each run...and when students believe they understand exactly what happens when they push, they stop being scared of the YAML.</a:t>
+              <a:t>Walking the steps really makes CI feel concrete. All it is underneath is a shell script running on a throwaway VM that GitHub provisions and tears down around each run...and when students believe they understand exactly what happens when they push, they stop being scared of the YAML.</a:t>
             </a:r>
             <a:endParaRPr dirty="0"/>
           </a:p>
@@ -3918,7 +3918,7 @@
             </a:pPr>
             <a:r>
               <a:rPr lang="en-US" dirty="0"/>
-              <a:t>The mental model is the same as the 8.1 'container is just a process' moment. Demystify the runner - it's not magic, it's an Ubuntu VM with nothing on it that runs your shell commands in order. Once students believe that, CI debugging stops being scary and starts being 'add a print, look at the log.' This is also the slide to mention that the working directory ($GITHUB_WORKSPACE) is where checkout drops the repo, in case anyone asks.</a:t>
+              <a:t>Same mental model as the 8.1 'container is just a process' moment. Demystify the runner - it's an Ubuntu VM with nothing on it, running your shell commands in order, and that's the whole story. Once students believe that, CI debugging stops being scary and starts being 'add a print, look at the log.' This is also the slide to mention that the working directory ($GITHUB_WORKSPACE) is where checkout drops the repo, in case anyone asks.</a:t>
             </a:r>
             <a:endParaRPr dirty="0"/>
           </a:p>
@@ -4764,7 +4764,7 @@
             </a:pPr>
             <a:r>
               <a:rPr lang="en-US" dirty="0"/>
-              <a:t>The actual payoff: wiring CI to the deploy pipeline so the two halves from the opening finally connect.</a:t>
+              <a:t>This is where it cashes in, wiring CI to the deploy pipeline so the two halves from the opening finally connect.</a:t>
             </a:r>
             <a:endParaRPr dirty="0"/>
           </a:p>
@@ -5088,7 +5088,7 @@
             </a:pPr>
             <a:r>
               <a:rPr lang="en-US" dirty="0"/>
-              <a:t>The deck's CD story has been Railway all along, which is fine because Railway is the recommended default and it really does the build-and-run for you. But a team that picks a plain server instead has a real gap: nothing builds or ships the image unless they wire it up. The fix is one more job in the same workflow file - on a push to main, build the image and push it to a registry, with GHCR the obvious pick since it's free and already tied to the repo. The server side is a docker pull and a restart, triggered however they like. The callback worth making out loud: the Actions runner doing this build is exactly 8.1's build machine, and it's itself a container, so you've got a container building and shipping another container. Don't go deep here, most teams will be on Railway - the point is that the non-PaaS path isn't a separate skill, it's the registry round-trip from 8.1 with a workflow job wrapped around it.</a:t>
+              <a:t>The deck's CD story has been Railway all along, which is fine because Railway is the recommended default and it really does the build-and-run for you. But a team that picks a plain server instead has a real gap: nothing builds or ships the image unless they wire it up. The fix is one more job in the same workflow file - on a push to main, build the image and push it to a registry, with GHCR the obvious pick since it's free and already tied to the repo. The server side is a docker pull and a restart, triggered however they like. The callback worth making out loud: the Actions runner doing this build is exactly 8.1's build machine, and it's itself a container, so you've got a container building and shipping another container. Don't go deep here, most teams will be on Railway - the point is that the non-PaaS path is just the registry round-trip from 8.1 with a workflow job wrapped around it, so it isn't some separate skill they have to go learn.</a:t>
             </a:r>
             <a:endParaRPr dirty="0"/>
           </a:p>
@@ -5246,7 +5246,7 @@
             </a:pPr>
             <a:r>
               <a:rPr lang="en-US" dirty="0"/>
-              <a:t>Branch protection is really what ties everything together. You don't configure Railway at all - you configure GitHub to never let bad code reach main in the first place. Railway just keeps doing its 'deploy on push' thing and it only ever sees passing code, because failing code never makes it to main.</a:t>
+              <a:t>Branch protection is really what ties everything together, and the trick is that you never touch Railway's config at all - you configure GitHub so that bad code can't reach main in the first place. Railway just keeps doing its 'deploy on push' thing and it only ever sees passing code, because failing code never makes it to main.</a:t>
             </a:r>
             <a:endParaRPr dirty="0"/>
           </a:p>
@@ -5404,7 +5404,7 @@
             </a:pPr>
             <a:r>
               <a:rPr lang="en-US" dirty="0"/>
-              <a:t>Branch protection is really what ties everything together. You don't configure Railway at all - you configure GitHub to never let bad code reach main in the first place. Railway just keeps doing its 'deploy on push' thing and it only ever sees passing code, because failing code never makes it to main.</a:t>
+              <a:t>Branch protection is really what ties everything together, and the trick is that you never touch Railway's config at all - you configure GitHub so that bad code can't reach main in the first place. Railway just keeps doing its 'deploy on push' thing and it only ever sees passing code, because failing code never makes it to main.</a:t>
             </a:r>
             <a:endParaRPr dirty="0"/>
           </a:p>
@@ -8366,7 +8366,7 @@
             </a:pPr>
             <a:r>
               <a:rPr lang="en-US" dirty="0"/>
-              <a:t>Students really do need to feel the inevitability here. It's not a hypothetical, it's the kind of thing that tends to catch a team out sooner or later, often right around when everyone's getting comfortable and starts skipping the test run. The fix isn't 'try harder to remember to run tests' because that has never worked for any engineer ever...the fix is to take the chore away from humans entirely.</a:t>
+              <a:t>Students really do need to feel the inevitability here. It's not a hypothetical, it's the kind of thing that tends to catch a team out sooner or later, often right around when everyone's getting comfortable and starts skipping the test run. Telling people to try harder to remember has never worked for any engineer ever...so the fix has to be taking the chore away from humans entirely.</a:t>
             </a:r>
             <a:endParaRPr dirty="0"/>
           </a:p>

--- a/lectures/Lecture 8.2 - Continuous Integration.pptx
+++ b/lectures/Lecture 8.2 - Continuous Integration.pptx
@@ -1012,20 +1012,9 @@
           </a:bodyPr>
           <a:lstStyle/>
           <a:p>
-            <a:pPr marL="0" lvl="0" indent="0" algn="l" rtl="0">
-              <a:spcBef>
-                <a:spcPts val="0"/>
-              </a:spcBef>
-              <a:spcAft>
-                <a:spcPts val="0"/>
-              </a:spcAft>
-              <a:buNone/>
-            </a:pPr>
-            <a:r>
-              <a:rPr lang="en-US" dirty="0"/>
-              <a:t>The value prop is really just 'take the chore away from humans.' The green check / red X next to commits is the thing students will see in the UI and intuitively get - CI makes test results visible in the same place the code lives. The blocked-merge feature is the one that actually changes team behavior, which is why we spend the back half of the lecture on it.</a:t>
-            </a:r>
-            <a:endParaRPr dirty="0"/>
+            <a:r>
+              <a:t>Blocked merge: the back half of today.</a:t>
+            </a:r>
           </a:p>
         </p:txBody>
       </p:sp>
@@ -1170,20 +1159,9 @@
           </a:bodyPr>
           <a:lstStyle/>
           <a:p>
-            <a:pPr marL="0" lvl="0" indent="0" algn="l" rtl="0">
-              <a:spcBef>
-                <a:spcPts val="0"/>
-              </a:spcBef>
-              <a:spcAft>
-                <a:spcPts val="0"/>
-              </a:spcAft>
-              <a:buNone/>
-            </a:pPr>
-            <a:r>
-              <a:rPr lang="en-US" dirty="0"/>
-              <a:t>The value prop is really just 'take the chore away from humans.' The green check / red X next to commits is the thing students will see in the UI and intuitively get - CI makes test results visible in the same place the code lives. The blocked-merge feature is the one that actually changes team behavior, which is why we spend the back half of the lecture on it.</a:t>
-            </a:r>
-            <a:endParaRPr dirty="0"/>
+            <a:r>
+              <a:t>Blocked merge: the back half of today.</a:t>
+            </a:r>
           </a:p>
         </p:txBody>
       </p:sp>
@@ -1328,20 +1306,9 @@
           </a:bodyPr>
           <a:lstStyle/>
           <a:p>
-            <a:pPr marL="0" lvl="0" indent="0" algn="l" rtl="0">
-              <a:spcBef>
-                <a:spcPts val="0"/>
-              </a:spcBef>
-              <a:spcAft>
-                <a:spcPts val="0"/>
-              </a:spcAft>
-              <a:buNone/>
-            </a:pPr>
-            <a:r>
-              <a:rPr lang="en-US" dirty="0"/>
-              <a:t>The value prop is really just 'take the chore away from humans.' The green check / red X next to commits is the thing students will see in the UI and intuitively get - CI makes test results visible in the same place the code lives. The blocked-merge feature is the one that actually changes team behavior, which is why we spend the back half of the lecture on it.</a:t>
-            </a:r>
-            <a:endParaRPr dirty="0"/>
+            <a:r>
+              <a:t>Blocked merge: the back half of today.</a:t>
+            </a:r>
           </a:p>
         </p:txBody>
       </p:sp>
@@ -1485,22 +1452,7 @@
             <a:noAutofit/>
           </a:bodyPr>
           <a:lstStyle/>
-          <a:p>
-            <a:pPr marL="0" lvl="0" indent="0" algn="l" rtl="0">
-              <a:spcBef>
-                <a:spcPts val="0"/>
-              </a:spcBef>
-              <a:spcAft>
-                <a:spcPts val="0"/>
-              </a:spcAft>
-              <a:buNone/>
-            </a:pPr>
-            <a:r>
-              <a:rPr lang="en-US" dirty="0"/>
-              <a:t>GitHub's built-in CI/CD. No separate service to sign up for, no separate auth, just add a YAML file and push.</a:t>
-            </a:r>
-            <a:endParaRPr dirty="0"/>
-          </a:p>
+          <a:p/>
         </p:txBody>
       </p:sp>
       <p:sp>
@@ -1644,28 +1596,9 @@
           </a:bodyPr>
           <a:lstStyle/>
           <a:p>
-            <a:pPr marL="0" lvl="0" indent="0" algn="l" rtl="0">
-              <a:spcBef>
-                <a:spcPts val="0"/>
-              </a:spcBef>
-              <a:spcAft>
-                <a:spcPts val="0"/>
-              </a:spcAft>
-              <a:buNone/>
-            </a:pPr>
-            <a:r>
-              <a:rPr lang="en-US" dirty="0"/>
-              <a:t>The surprise for students coming from other CI systems like </a:t>
-            </a:r>
-            <a:r>
-              <a:rPr lang="en-US" dirty="0" err="1"/>
-              <a:t>CircleCI</a:t>
-            </a:r>
-            <a:r>
-              <a:rPr lang="en-US" dirty="0"/>
-              <a:t> or Jenkins is really 'it's just a file in your repo.' No separate service, no separate auth, no separate dashboard...drop the file, push, and it's running. That simplicity is a huge part of why GHA took over as the default for small projects.</a:t>
-            </a:r>
-            <a:endParaRPr dirty="0"/>
+            <a:r>
+              <a:t>Contrast with CircleCI / Jenkins: just a file in your repo.</a:t>
+            </a:r>
           </a:p>
         </p:txBody>
       </p:sp>
@@ -1810,20 +1743,9 @@
           </a:bodyPr>
           <a:lstStyle/>
           <a:p>
-            <a:pPr marL="0" lvl="0" indent="0" algn="l" rtl="0">
-              <a:spcBef>
-                <a:spcPts val="0"/>
-              </a:spcBef>
-              <a:spcAft>
-                <a:spcPts val="0"/>
-              </a:spcAft>
-              <a:buNone/>
-            </a:pPr>
-            <a:r>
-              <a:rPr lang="en-US" dirty="0"/>
-              <a:t>The four-word vocabulary is really the scaffolding for every CI lecture or tutorial they'll ever read, and it's worth memorizing once because they'll be recognizing it for years after this. Reinforce the hierarchy out loud: events trigger workflows, workflows contain jobs, jobs contain steps...once that shape is in their heads the YAML on the next slide stops looking intimidating.</a:t>
-            </a:r>
-            <a:endParaRPr dirty="0"/>
+            <a:r>
+              <a:t>Say the hierarchy out loud: events trigger workflows, workflows contain jobs, jobs contain steps.</a:t>
+            </a:r>
           </a:p>
         </p:txBody>
       </p:sp>
@@ -1968,20 +1890,9 @@
           </a:bodyPr>
           <a:lstStyle/>
           <a:p>
-            <a:pPr marL="0" lvl="0" indent="0" algn="l" rtl="0">
-              <a:spcBef>
-                <a:spcPts val="0"/>
-              </a:spcBef>
-              <a:spcAft>
-                <a:spcPts val="0"/>
-              </a:spcAft>
-              <a:buNone/>
-            </a:pPr>
-            <a:r>
-              <a:rPr lang="en-US" dirty="0"/>
-              <a:t>The four-word vocabulary is really the scaffolding for every CI lecture or tutorial they'll ever read, and it's worth memorizing once because they'll be recognizing it for years after this. Reinforce the hierarchy out loud: events trigger workflows, workflows contain jobs, jobs contain steps...once that shape is in their heads the YAML on the next slide stops looking intimidating.</a:t>
-            </a:r>
-            <a:endParaRPr dirty="0"/>
+            <a:r>
+              <a:t>Say the hierarchy out loud: events trigger workflows, workflows contain jobs, jobs contain steps.</a:t>
+            </a:r>
           </a:p>
         </p:txBody>
       </p:sp>
@@ -2126,20 +2037,9 @@
           </a:bodyPr>
           <a:lstStyle/>
           <a:p>
-            <a:pPr marL="0" lvl="0" indent="0" algn="l" rtl="0">
-              <a:spcBef>
-                <a:spcPts val="0"/>
-              </a:spcBef>
-              <a:spcAft>
-                <a:spcPts val="0"/>
-              </a:spcAft>
-              <a:buNone/>
-            </a:pPr>
-            <a:r>
-              <a:rPr lang="en-US" dirty="0"/>
-              <a:t>The four-word vocabulary is really the scaffolding for every CI lecture or tutorial they'll ever read, and it's worth memorizing once because they'll be recognizing it for years after this. Reinforce the hierarchy out loud: events trigger workflows, workflows contain jobs, jobs contain steps...once that shape is in their heads the YAML on the next slide stops looking intimidating.</a:t>
-            </a:r>
-            <a:endParaRPr dirty="0"/>
+            <a:r>
+              <a:t>Say the hierarchy out loud: events trigger workflows, workflows contain jobs, jobs contain steps.</a:t>
+            </a:r>
           </a:p>
         </p:txBody>
       </p:sp>
@@ -2284,20 +2184,9 @@
           </a:bodyPr>
           <a:lstStyle/>
           <a:p>
-            <a:pPr marL="0" lvl="0" indent="0" algn="l" rtl="0">
-              <a:spcBef>
-                <a:spcPts val="0"/>
-              </a:spcBef>
-              <a:spcAft>
-                <a:spcPts val="0"/>
-              </a:spcAft>
-              <a:buNone/>
-            </a:pPr>
-            <a:r>
-              <a:rPr lang="en-US" dirty="0"/>
-              <a:t>The four-word vocabulary is really the scaffolding for every CI lecture or tutorial they'll ever read, and it's worth memorizing once because they'll be recognizing it for years after this. Reinforce the hierarchy out loud: events trigger workflows, workflows contain jobs, jobs contain steps...once that shape is in their heads the YAML on the next slide stops looking intimidating.</a:t>
-            </a:r>
-            <a:endParaRPr dirty="0"/>
+            <a:r>
+              <a:t>Say the hierarchy out loud: events trigger workflows, workflows contain jobs, jobs contain steps.</a:t>
+            </a:r>
           </a:p>
         </p:txBody>
       </p:sp>
@@ -2441,30 +2330,7 @@
             <a:noAutofit/>
           </a:bodyPr>
           <a:lstStyle/>
-          <a:p>
-            <a:pPr marL="0" lvl="0" indent="0" algn="l" rtl="0">
-              <a:spcBef>
-                <a:spcPts val="0"/>
-              </a:spcBef>
-              <a:spcAft>
-                <a:spcPts val="0"/>
-              </a:spcAft>
-              <a:buNone/>
-            </a:pPr>
-            <a:r>
-              <a:rPr lang="en-US" dirty="0"/>
-              <a:t>It's easy to get stuck on where the file goes and what to name it the first time - it's a silly little blocker but a real one. The .</a:t>
-            </a:r>
-            <a:r>
-              <a:rPr lang="en-US" dirty="0" err="1"/>
-              <a:t>github</a:t>
-            </a:r>
-            <a:r>
-              <a:rPr lang="en-US" dirty="0"/>
-              <a:t>/workflows/ path is a GitHub convention and GHA really won't find workflows anywhere else, so getting that path right is the whole battle. Filenames inside the folder are just labels.</a:t>
-            </a:r>
-            <a:endParaRPr dirty="0"/>
-          </a:p>
+          <a:p/>
         </p:txBody>
       </p:sp>
       <p:sp>
@@ -2607,22 +2473,7 @@
             <a:noAutofit/>
           </a:bodyPr>
           <a:lstStyle/>
-          <a:p>
-            <a:pPr marL="0" lvl="0" indent="0" algn="l" rtl="0">
-              <a:spcBef>
-                <a:spcPts val="0"/>
-              </a:spcBef>
-              <a:spcAft>
-                <a:spcPts val="0"/>
-              </a:spcAft>
-              <a:buNone/>
-            </a:pPr>
-            <a:r>
-              <a:rPr lang="en-US" dirty="0"/>
-              <a:t>Open with the callback that motivates today. Tests and deployment have been sitting as two separate skills that don't really help each other, and that's the gap we're closing.</a:t>
-            </a:r>
-            <a:endParaRPr dirty="0"/>
-          </a:p>
+          <a:p/>
         </p:txBody>
       </p:sp>
       <p:sp>
@@ -2766,52 +2617,9 @@
           </a:bodyPr>
           <a:lstStyle/>
           <a:p>
-            <a:pPr marL="0" lvl="0" indent="0" algn="l" rtl="0">
-              <a:spcBef>
-                <a:spcPts val="0"/>
-              </a:spcBef>
-              <a:spcAft>
-                <a:spcPts val="0"/>
-              </a:spcAft>
-              <a:buNone/>
-            </a:pPr>
-            <a:r>
-              <a:rPr lang="en-US" dirty="0"/>
-              <a:t>Walk through each line. `name` is a label that shows up in the GitHub UI. `on` is the list of events that trigger this workflow - push and </a:t>
-            </a:r>
-            <a:r>
-              <a:rPr lang="en-US" dirty="0" err="1"/>
-              <a:t>pull_request</a:t>
-            </a:r>
-            <a:r>
-              <a:rPr lang="en-US" dirty="0"/>
-              <a:t> covers basically everything. `jobs` is a </a:t>
-            </a:r>
-            <a:r>
-              <a:rPr lang="en-US" dirty="0" err="1"/>
-              <a:t>dict</a:t>
-            </a:r>
-            <a:r>
-              <a:rPr lang="en-US" dirty="0"/>
-              <a:t> of jobs, and here we just have one named 'test'. `runs-on` picks the OS of the fresh VM. The four steps really are the whole thing: check out the code, set up Python, install deps, run </a:t>
-            </a:r>
-            <a:r>
-              <a:rPr lang="en-US" dirty="0" err="1"/>
-              <a:t>pytest</a:t>
-            </a:r>
-            <a:r>
-              <a:rPr lang="en-US" dirty="0"/>
-              <a:t>. Maybe 15 lines total, which is </a:t>
-            </a:r>
-            <a:r>
-              <a:rPr lang="en-US" dirty="0" err="1"/>
-              <a:t>kinda</a:t>
-            </a:r>
-            <a:r>
-              <a:rPr lang="en-US" dirty="0"/>
-              <a:t> astonishing given what it does.</a:t>
-            </a:r>
-            <a:endParaRPr dirty="0"/>
+            <a:r>
+              <a:t>Walk through line by line.</a:t>
+            </a:r>
           </a:p>
         </p:txBody>
       </p:sp>
@@ -2955,22 +2763,7 @@
             <a:noAutofit/>
           </a:bodyPr>
           <a:lstStyle/>
-          <a:p>
-            <a:pPr marL="0" lvl="0" indent="0" algn="l" rtl="0">
-              <a:spcBef>
-                <a:spcPts val="0"/>
-              </a:spcBef>
-              <a:spcAft>
-                <a:spcPts val="0"/>
-              </a:spcAft>
-              <a:buNone/>
-            </a:pPr>
-            <a:r>
-              <a:rPr lang="en-US" dirty="0"/>
-              <a:t>Walking the steps really makes CI feel concrete. All it is underneath is a shell script running on a throwaway VM that GitHub provisions and tears down around each run...and when students believe they understand exactly what happens when they push, they stop being scared of the YAML.</a:t>
-            </a:r>
-            <a:endParaRPr dirty="0"/>
-          </a:p>
+          <a:p/>
         </p:txBody>
       </p:sp>
       <p:sp>
@@ -3114,20 +2907,9 @@
           </a:bodyPr>
           <a:lstStyle/>
           <a:p>
-            <a:pPr marL="0" lvl="0" indent="0" algn="l" rtl="0">
-              <a:spcBef>
-                <a:spcPts val="0"/>
-              </a:spcBef>
-              <a:spcAft>
-                <a:spcPts val="0"/>
-              </a:spcAft>
-              <a:buNone/>
-            </a:pPr>
-            <a:r>
-              <a:rPr lang="en-US" dirty="0"/>
-              <a:t>Adding `cache: pip` to the setup-python step makes pip reuse its download cache across runs. First run is the same speed, but every subsequent run skips the download step and goes way faster...small change, real speedup, and really just a good default habit for any Python workflow you write from now on.</a:t>
-            </a:r>
-            <a:endParaRPr dirty="0"/>
+            <a:r>
+              <a:t>`cache: pip`: first run same speed, later runs skip the download.</a:t>
+            </a:r>
           </a:p>
         </p:txBody>
       </p:sp>
@@ -3272,20 +3054,9 @@
           </a:bodyPr>
           <a:lstStyle/>
           <a:p>
-            <a:pPr marL="0" lvl="0" indent="0" algn="l" rtl="0">
-              <a:spcBef>
-                <a:spcPts val="0"/>
-              </a:spcBef>
-              <a:spcAft>
-                <a:spcPts val="0"/>
-              </a:spcAft>
-              <a:buNone/>
-            </a:pPr>
-            <a:r>
-              <a:rPr lang="en-US" dirty="0"/>
-              <a:t>Adding `cache: pip` to the setup-python step makes pip reuse its download cache across runs. First run is the same speed, but every subsequent run skips the download step and goes way faster...small change, real speedup, and really just a good default habit for any Python workflow you write from now on.</a:t>
-            </a:r>
-            <a:endParaRPr dirty="0"/>
+            <a:r>
+              <a:t>`cache: pip`: first run same speed, later runs skip the download.</a:t>
+            </a:r>
           </a:p>
         </p:txBody>
       </p:sp>
@@ -3429,22 +3200,7 @@
             <a:noAutofit/>
           </a:bodyPr>
           <a:lstStyle/>
-          <a:p>
-            <a:pPr marL="0" lvl="0" indent="0" algn="l" rtl="0">
-              <a:spcBef>
-                <a:spcPts val="0"/>
-              </a:spcBef>
-              <a:spcAft>
-                <a:spcPts val="0"/>
-              </a:spcAft>
-              <a:buNone/>
-            </a:pPr>
-            <a:r>
-              <a:rPr lang="en-US" dirty="0"/>
-              <a:t>Adding `cache: pip` to the setup-python step makes pip reuse its download cache across runs. First run is the same speed, but every subsequent run skips the download step and goes way faster...small change, real speedup, and really just a good default habit for any Python workflow you write from now on.</a:t>
-            </a:r>
-            <a:endParaRPr dirty="0"/>
-          </a:p>
+          <a:p/>
         </p:txBody>
       </p:sp>
       <p:sp>
@@ -3588,181 +3344,9 @@
           </a:bodyPr>
           <a:lstStyle/>
           <a:p>
-            <a:pPr marL="0" lvl="0" indent="0" algn="l" rtl="0">
-              <a:spcBef>
-                <a:spcPts val="0"/>
-              </a:spcBef>
-              <a:spcAft>
-                <a:spcPts val="0"/>
-              </a:spcAft>
-              <a:buNone/>
-            </a:pPr>
-            <a:r>
-              <a:rPr lang="en-US" dirty="0"/>
-              <a:t># You push a commit. What does the Actions tab show?</a:t>
-            </a:r>
-            <a:endParaRPr dirty="0"/>
-          </a:p>
-          <a:p>
-            <a:pPr marL="0" lvl="0" indent="0" algn="l" rtl="0">
-              <a:spcBef>
-                <a:spcPts val="0"/>
-              </a:spcBef>
-              <a:spcAft>
-                <a:spcPts val="0"/>
-              </a:spcAft>
-              <a:buNone/>
-            </a:pPr>
-            <a:r>
-              <a:rPr lang="en-US" dirty="0"/>
-              <a:t>#</a:t>
-            </a:r>
-            <a:endParaRPr dirty="0"/>
-          </a:p>
-          <a:p>
-            <a:pPr marL="0" lvl="0" indent="0" algn="l" rtl="0">
-              <a:spcBef>
-                <a:spcPts val="0"/>
-              </a:spcBef>
-              <a:spcAft>
-                <a:spcPts val="0"/>
-              </a:spcAft>
-              <a:buNone/>
-            </a:pPr>
-            <a:r>
-              <a:rPr lang="en-US" dirty="0"/>
-              <a:t>#   (a)  green check - the workflow runs fine</a:t>
-            </a:r>
-            <a:endParaRPr dirty="0"/>
-          </a:p>
-          <a:p>
-            <a:pPr marL="0" lvl="0" indent="0" algn="l" rtl="0">
-              <a:spcBef>
-                <a:spcPts val="0"/>
-              </a:spcBef>
-              <a:spcAft>
-                <a:spcPts val="0"/>
-              </a:spcAft>
-              <a:buNone/>
-            </a:pPr>
-            <a:r>
-              <a:rPr lang="en-US" dirty="0"/>
-              <a:t>#   (b)  red X on `pip install` (no </a:t>
-            </a:r>
-            <a:r>
-              <a:rPr lang="en-US" dirty="0" err="1"/>
-              <a:t>requirements.txt</a:t>
-            </a:r>
-            <a:r>
-              <a:rPr lang="en-US" dirty="0"/>
-              <a:t>)</a:t>
-            </a:r>
-            <a:endParaRPr dirty="0"/>
-          </a:p>
-          <a:p>
-            <a:pPr marL="0" lvl="0" indent="0" algn="l" rtl="0">
-              <a:spcBef>
-                <a:spcPts val="0"/>
-              </a:spcBef>
-              <a:spcAft>
-                <a:spcPts val="0"/>
-              </a:spcAft>
-              <a:buNone/>
-            </a:pPr>
-            <a:r>
-              <a:rPr lang="en-US" dirty="0"/>
-              <a:t>#   (c)  red X on `</a:t>
-            </a:r>
-            <a:r>
-              <a:rPr lang="en-US" dirty="0" err="1"/>
-              <a:t>pytest</a:t>
-            </a:r>
-            <a:r>
-              <a:rPr lang="en-US" dirty="0"/>
-              <a:t>` (no tests found)</a:t>
-            </a:r>
-            <a:endParaRPr dirty="0"/>
-          </a:p>
-          <a:p>
-            <a:pPr marL="0" lvl="0" indent="0" algn="l" rtl="0">
-              <a:spcBef>
-                <a:spcPts val="0"/>
-              </a:spcBef>
-              <a:spcAft>
-                <a:spcPts val="0"/>
-              </a:spcAft>
-              <a:buNone/>
-            </a:pPr>
-            <a:r>
-              <a:rPr lang="en-US" dirty="0"/>
-              <a:t>#   (d)  red X on `setup-python` (it needs the repo first)</a:t>
-            </a:r>
-            <a:endParaRPr dirty="0"/>
-          </a:p>
-          <a:p>
-            <a:pPr marL="0" lvl="0" indent="0" algn="l" rtl="0">
-              <a:spcBef>
-                <a:spcPts val="0"/>
-              </a:spcBef>
-              <a:spcAft>
-                <a:spcPts val="0"/>
-              </a:spcAft>
-              <a:buNone/>
-            </a:pPr>
-            <a:endParaRPr dirty="0"/>
-          </a:p>
-          <a:p>
-            <a:pPr marL="0" lvl="0" indent="0" algn="l" rtl="0">
-              <a:spcBef>
-                <a:spcPts val="0"/>
-              </a:spcBef>
-              <a:spcAft>
-                <a:spcPts val="0"/>
-              </a:spcAft>
-              <a:buClr>
-                <a:schemeClr val="dk1"/>
-              </a:buClr>
-              <a:buSzPts val="1100"/>
-              <a:buFont typeface="Arial"/>
-              <a:buNone/>
-            </a:pPr>
-            <a:r>
-              <a:rPr lang="en-US" dirty="0">
-                <a:solidFill>
-                  <a:schemeClr val="dk1"/>
-                </a:solidFill>
-              </a:rPr>
-              <a:t>The runner is a brand-new Ubuntu VM with literally nothing on it - no repo, no files, nothing. `setup-python` happily installs Python because that step doesn't need your code. Then `pip install -r </a:t>
-            </a:r>
-            <a:r>
-              <a:rPr lang="en-US" dirty="0" err="1">
-                <a:solidFill>
-                  <a:schemeClr val="dk1"/>
-                </a:solidFill>
-              </a:rPr>
-              <a:t>requirements.txt</a:t>
-            </a:r>
-            <a:r>
-              <a:rPr lang="en-US" dirty="0">
-                <a:solidFill>
-                  <a:schemeClr val="dk1"/>
-                </a:solidFill>
-              </a:rPr>
-              <a:t>` looks for the file in the working directory, doesn't find it, exits non-zero, and the job halts.</a:t>
-            </a:r>
-            <a:endParaRPr dirty="0"/>
-          </a:p>
-          <a:p>
-            <a:pPr marL="0" lvl="0" indent="0" algn="l" rtl="0">
-              <a:spcBef>
-                <a:spcPts val="0"/>
-              </a:spcBef>
-              <a:spcAft>
-                <a:spcPts val="0"/>
-              </a:spcAft>
-              <a:buNone/>
-            </a:pPr>
-            <a:endParaRPr dirty="0"/>
+            <a:r>
+              <a:t>Answer (b): fresh VM, no repo without checkout; setup-python doesn't need code, pip does.</a:t>
+            </a:r>
           </a:p>
         </p:txBody>
       </p:sp>
@@ -3907,20 +3491,9 @@
           </a:bodyPr>
           <a:lstStyle/>
           <a:p>
-            <a:pPr marL="0" lvl="0" indent="0" algn="l" rtl="0">
-              <a:spcBef>
-                <a:spcPts val="0"/>
-              </a:spcBef>
-              <a:spcAft>
-                <a:spcPts val="0"/>
-              </a:spcAft>
-              <a:buNone/>
-            </a:pPr>
-            <a:r>
-              <a:rPr lang="en-US" dirty="0"/>
-              <a:t>Same mental model as the 8.1 'container is just a process' moment. Demystify the runner - it's an Ubuntu VM with nothing on it, running your shell commands in order, and that's the whole story. Once students believe that, CI debugging stops being scary and starts being 'add a print, look at the log.' This is also the slide to mention that the working directory ($GITHUB_WORKSPACE) is where checkout drops the repo, in case anyone asks.</a:t>
-            </a:r>
-            <a:endParaRPr dirty="0"/>
+            <a:r>
+              <a:t>Same model as 8.1's 'container is just a process'. Workdir is $GITHUB_WORKSPACE if asked.</a:t>
+            </a:r>
           </a:p>
         </p:txBody>
       </p:sp>
@@ -4065,28 +3638,9 @@
           </a:bodyPr>
           <a:lstStyle/>
           <a:p>
-            <a:pPr marL="0" lvl="0" indent="0" algn="l" rtl="0">
-              <a:spcBef>
-                <a:spcPts val="0"/>
-              </a:spcBef>
-              <a:spcAft>
-                <a:spcPts val="0"/>
-              </a:spcAft>
-              <a:buNone/>
-            </a:pPr>
-            <a:r>
-              <a:rPr lang="en-US" dirty="0"/>
-              <a:t>Matrix is the GHA way of running one job across multiple environments without duplicating the YAML. The common cases are Python versions (libraries that need to work on both 3.11 and 3.12), OS (`ubuntu-latest`, `</a:t>
-            </a:r>
-            <a:r>
-              <a:rPr lang="en-US" dirty="0" err="1"/>
-              <a:t>macos</a:t>
-            </a:r>
-            <a:r>
-              <a:rPr lang="en-US" dirty="0"/>
-              <a:t>-latest`, `windows-latest`), or any combination. Both runs go in parallel on separate VMs, both have to pass for the workflow to be green. For the final project you really don't need this - you're targeting one Python version on one Linux box - but you'll see it constantly in the wild on open-source libraries, and now you know what it does.</a:t>
-            </a:r>
-            <a:endParaRPr dirty="0"/>
+            <a:r>
+              <a:t>Also OS matrix (ubuntu/macos/windows). Final project doesn't need this.</a:t>
+            </a:r>
           </a:p>
         </p:txBody>
       </p:sp>
@@ -4231,44 +3785,9 @@
           </a:bodyPr>
           <a:lstStyle/>
           <a:p>
-            <a:pPr marL="0" lvl="0" indent="0" algn="l" rtl="0">
-              <a:spcBef>
-                <a:spcPts val="0"/>
-              </a:spcBef>
-              <a:spcAft>
-                <a:spcPts val="0"/>
-              </a:spcAft>
-              <a:buNone/>
-            </a:pPr>
-            <a:r>
-              <a:rPr lang="en-US" dirty="0"/>
-              <a:t>The rule worth pulling out: anything deterministic that fails the same way every time belongs in CI. Tests are the obvious case but linters and formatters are right there with them - ruff for Python, </a:t>
-            </a:r>
-            <a:r>
-              <a:rPr lang="en-US" dirty="0" err="1"/>
-              <a:t>eslint+prettier</a:t>
-            </a:r>
-            <a:r>
-              <a:rPr lang="en-US" dirty="0"/>
-              <a:t> for the JS side, </a:t>
-            </a:r>
-            <a:r>
-              <a:rPr lang="en-US" dirty="0" err="1"/>
-              <a:t>mypy</a:t>
-            </a:r>
-            <a:r>
-              <a:rPr lang="en-US" dirty="0"/>
-              <a:t> if you've added type checking. Two jobs in one file run in parallel on separate VMs, so adding lint doesn't slow tests down at all. Mention that `ruff format --check .` can be a third step in the lint job to enforce formatting too - fails CI if anyone committed unformatted code, which is the cheapest possible way to end formatting </a:t>
-            </a:r>
-            <a:r>
-              <a:rPr lang="en-US" dirty="0" err="1"/>
-              <a:t>bikeshedding</a:t>
-            </a:r>
-            <a:r>
-              <a:rPr lang="en-US" dirty="0"/>
-              <a:t> on a team forever.</a:t>
-            </a:r>
-            <a:endParaRPr dirty="0"/>
+            <a:r>
+              <a:t>Anything deterministic belongs in CI: ruff, eslint/prettier, mypy. Third lint step: `ruff format --check .`</a:t>
+            </a:r>
           </a:p>
         </p:txBody>
       </p:sp>
@@ -4413,44 +3932,9 @@
           </a:bodyPr>
           <a:lstStyle/>
           <a:p>
-            <a:pPr marL="0" lvl="0" indent="0" algn="l" rtl="0">
-              <a:spcBef>
-                <a:spcPts val="0"/>
-              </a:spcBef>
-              <a:spcAft>
-                <a:spcPts val="0"/>
-              </a:spcAft>
-              <a:buNone/>
-            </a:pPr>
-            <a:r>
-              <a:rPr lang="en-US" dirty="0"/>
-              <a:t>The rule worth pulling out: anything deterministic that fails the same way every time belongs in CI. Tests are the obvious case but linters and formatters are right there with them - ruff for Python, </a:t>
-            </a:r>
-            <a:r>
-              <a:rPr lang="en-US" dirty="0" err="1"/>
-              <a:t>eslint+prettier</a:t>
-            </a:r>
-            <a:r>
-              <a:rPr lang="en-US" dirty="0"/>
-              <a:t> for the JS side, </a:t>
-            </a:r>
-            <a:r>
-              <a:rPr lang="en-US" dirty="0" err="1"/>
-              <a:t>mypy</a:t>
-            </a:r>
-            <a:r>
-              <a:rPr lang="en-US" dirty="0"/>
-              <a:t> if you've added type checking. Two jobs in one file run in parallel on separate VMs, so adding lint doesn't slow tests down at all. Mention that `ruff format --check .` can be a third step in the lint job to enforce formatting too - fails CI if anyone committed unformatted code, which is the cheapest possible way to end formatting </a:t>
-            </a:r>
-            <a:r>
-              <a:rPr lang="en-US" dirty="0" err="1"/>
-              <a:t>bikeshedding</a:t>
-            </a:r>
-            <a:r>
-              <a:rPr lang="en-US" dirty="0"/>
-              <a:t> on a team forever.</a:t>
-            </a:r>
-            <a:endParaRPr dirty="0"/>
+            <a:r>
+              <a:t>Anything deterministic belongs in CI: ruff, eslint/prettier, mypy. Third lint step: `ruff format --check .`</a:t>
+            </a:r>
           </a:p>
         </p:txBody>
       </p:sp>
@@ -4595,20 +4079,9 @@
           </a:bodyPr>
           <a:lstStyle/>
           <a:p>
-            <a:pPr marL="0" lvl="0" indent="0" algn="l" rtl="0">
-              <a:spcBef>
-                <a:spcPts val="0"/>
-              </a:spcBef>
-              <a:spcAft>
-                <a:spcPts val="0"/>
-              </a:spcAft>
-              <a:buNone/>
-            </a:pPr>
-            <a:r>
-              <a:rPr lang="en-US" dirty="0"/>
-              <a:t>The callback structure sets up the thesis really directly. Tests on one side, deploys on the other, no glue between them...and students should feel the gap before the solution gets named. Ask the room: 'who has ever pushed code and forgotten to run the tests first?' Every hand goes up, including mine.</a:t>
-            </a:r>
-            <a:endParaRPr dirty="0"/>
+            <a:r>
+              <a:t>Ask: who's pushed code and forgotten to run tests first? Raise my hand too.</a:t>
+            </a:r>
           </a:p>
         </p:txBody>
       </p:sp>
@@ -4752,22 +4225,7 @@
             <a:noAutofit/>
           </a:bodyPr>
           <a:lstStyle/>
-          <a:p>
-            <a:pPr marL="0" lvl="0" indent="0" algn="l" rtl="0">
-              <a:spcBef>
-                <a:spcPts val="0"/>
-              </a:spcBef>
-              <a:spcAft>
-                <a:spcPts val="0"/>
-              </a:spcAft>
-              <a:buNone/>
-            </a:pPr>
-            <a:r>
-              <a:rPr lang="en-US" dirty="0"/>
-              <a:t>This is where it cashes in, wiring CI to the deploy pipeline so the two halves from the opening finally connect.</a:t>
-            </a:r>
-            <a:endParaRPr dirty="0"/>
-          </a:p>
+          <a:p/>
         </p:txBody>
       </p:sp>
       <p:sp>
@@ -4910,30 +4368,7 @@
             <a:noAutofit/>
           </a:bodyPr>
           <a:lstStyle/>
-          <a:p>
-            <a:pPr marL="0" lvl="0" indent="0" algn="l" rtl="0">
-              <a:spcBef>
-                <a:spcPts val="0"/>
-              </a:spcBef>
-              <a:spcAft>
-                <a:spcPts val="0"/>
-              </a:spcAft>
-              <a:buNone/>
-            </a:pPr>
-            <a:r>
-              <a:rPr lang="en-US" dirty="0"/>
-              <a:t>CI and CD really do get conflated in casual usage but they're different. CI is automatic testing, CD is automatic deployment, and the ideal is both with CD gated on CI...Railway alone gives you CD without the gate, which is </a:t>
-            </a:r>
-            <a:r>
-              <a:rPr lang="en-US" dirty="0" err="1"/>
-              <a:t>kinda</a:t>
-            </a:r>
-            <a:r>
-              <a:rPr lang="en-US" dirty="0"/>
-              <a:t> the worst of both worlds if you think about it. We're about to add the gate.</a:t>
-            </a:r>
-            <a:endParaRPr dirty="0"/>
-          </a:p>
+          <a:p/>
         </p:txBody>
       </p:sp>
       <p:sp>
@@ -5077,20 +4512,9 @@
           </a:bodyPr>
           <a:lstStyle/>
           <a:p>
-            <a:pPr marL="0" lvl="0" indent="0" algn="l" rtl="0">
-              <a:spcBef>
-                <a:spcPts val="0"/>
-              </a:spcBef>
-              <a:spcAft>
-                <a:spcPts val="0"/>
-              </a:spcAft>
-              <a:buNone/>
-            </a:pPr>
-            <a:r>
-              <a:rPr lang="en-US" dirty="0"/>
-              <a:t>The deck's CD story has been Railway all along, which is fine because Railway is the recommended default and it really does the build-and-run for you. But a team that picks a plain server instead has a real gap: nothing builds or ships the image unless they wire it up. The fix is one more job in the same workflow file - on a push to main, build the image and push it to a registry, with GHCR the obvious pick since it's free and already tied to the repo. The server side is a docker pull and a restart, triggered however they like. The callback worth making out loud: the Actions runner doing this build is exactly 8.1's build machine, and it's itself a container, so you've got a container building and shipping another container. Don't go deep here, most teams will be on Railway - the point is that the non-PaaS path is just the registry round-trip from 8.1 with a workflow job wrapped around it, so it isn't some separate skill they have to go learn.</a:t>
-            </a:r>
-            <a:endParaRPr dirty="0"/>
+            <a:r>
+              <a:t>Don't go deep, most teams will be on Railway.</a:t>
+            </a:r>
           </a:p>
         </p:txBody>
       </p:sp>
@@ -5234,22 +4658,7 @@
             <a:noAutofit/>
           </a:bodyPr>
           <a:lstStyle/>
-          <a:p>
-            <a:pPr marL="0" lvl="0" indent="0" algn="l" rtl="0">
-              <a:spcBef>
-                <a:spcPts val="0"/>
-              </a:spcBef>
-              <a:spcAft>
-                <a:spcPts val="0"/>
-              </a:spcAft>
-              <a:buNone/>
-            </a:pPr>
-            <a:r>
-              <a:rPr lang="en-US" dirty="0"/>
-              <a:t>Branch protection is really what ties everything together, and the trick is that you never touch Railway's config at all - you configure GitHub so that bad code can't reach main in the first place. Railway just keeps doing its 'deploy on push' thing and it only ever sees passing code, because failing code never makes it to main.</a:t>
-            </a:r>
-            <a:endParaRPr dirty="0"/>
-          </a:p>
+          <a:p/>
         </p:txBody>
       </p:sp>
       <p:sp>
@@ -5392,22 +4801,7 @@
             <a:noAutofit/>
           </a:bodyPr>
           <a:lstStyle/>
-          <a:p>
-            <a:pPr marL="0" lvl="0" indent="0" algn="l" rtl="0">
-              <a:spcBef>
-                <a:spcPts val="0"/>
-              </a:spcBef>
-              <a:spcAft>
-                <a:spcPts val="0"/>
-              </a:spcAft>
-              <a:buNone/>
-            </a:pPr>
-            <a:r>
-              <a:rPr lang="en-US" dirty="0"/>
-              <a:t>Branch protection is really what ties everything together, and the trick is that you never touch Railway's config at all - you configure GitHub so that bad code can't reach main in the first place. Railway just keeps doing its 'deploy on push' thing and it only ever sees passing code, because failing code never makes it to main.</a:t>
-            </a:r>
-            <a:endParaRPr dirty="0"/>
-          </a:p>
+          <a:p/>
         </p:txBody>
       </p:sp>
       <p:sp>
@@ -5551,28 +4945,9 @@
           </a:bodyPr>
           <a:lstStyle/>
           <a:p>
-            <a:pPr marL="0" lvl="0" indent="0" algn="l" rtl="0">
-              <a:spcBef>
-                <a:spcPts val="0"/>
-              </a:spcBef>
-              <a:spcAft>
-                <a:spcPts val="0"/>
-              </a:spcAft>
-              <a:buNone/>
-            </a:pPr>
-            <a:r>
-              <a:rPr lang="en-US" dirty="0"/>
-              <a:t>Call-on-someone. The answer is (d). Walk both bugs out. Bug one is the hardcoded literal: anything under .</a:t>
-            </a:r>
-            <a:r>
-              <a:rPr lang="en-US" dirty="0" err="1"/>
-              <a:t>github</a:t>
-            </a:r>
-            <a:r>
-              <a:rPr lang="en-US" dirty="0"/>
-              <a:t>/workflows/ lives in your repo, and on a public repo that means anyone on the internet can read it - including past versions in git history, so renaming the key in a follow-up commit doesn't help. Bug two is the echo: build logs are public for any PR on a public repo, and even on a private repo every collaborator can read them. The echo would print the actual secret value into that log forever. The combination - store it in source AND print it - is the exact pair that has burned more real teams than any other single CI mistake. Next slide is the safe pattern.</a:t>
-            </a:r>
-            <a:endParaRPr dirty="0"/>
+            <a:r>
+              <a:t>Call on someone. Answer (d): key stays in git history, logs readable on any PR.</a:t>
+            </a:r>
           </a:p>
         </p:txBody>
       </p:sp>
@@ -5717,20 +5092,9 @@
           </a:bodyPr>
           <a:lstStyle/>
           <a:p>
-            <a:pPr marL="0" lvl="0" indent="0" algn="l" rtl="0">
-              <a:spcBef>
-                <a:spcPts val="0"/>
-              </a:spcBef>
-              <a:spcAft>
-                <a:spcPts val="0"/>
-              </a:spcAft>
-              <a:buNone/>
-            </a:pPr>
-            <a:r>
-              <a:rPr lang="en-US" dirty="0"/>
-              <a:t>The takeaway is the same pattern as the 8.1 .env spot-the-bug: if you don't tell the system the value is sensitive, it will treat it like any other string and print it where you don't want it printed. GitHub Secrets is the channel that knows, the same way --env-file and Railway's dashboard were the channels that knew for runtime config in 7.2 and 8.1. The masking-in-logs thing is worth showing in the UI if you have time - GHA shows `***` instead of the secret value in any log line that contains it, which is a nice second line of defense but really shouldn't be the first.</a:t>
-            </a:r>
-            <a:endParaRPr dirty="0"/>
+            <a:r>
+              <a:t>Same pattern as 8.1's .env spot-the-bug. If time, show `***` masking in UI.</a:t>
+            </a:r>
           </a:p>
         </p:txBody>
       </p:sp>
@@ -5875,20 +5239,9 @@
           </a:bodyPr>
           <a:lstStyle/>
           <a:p>
-            <a:pPr marL="0" lvl="0" indent="0" algn="l" rtl="0">
-              <a:spcBef>
-                <a:spcPts val="0"/>
-              </a:spcBef>
-              <a:spcAft>
-                <a:spcPts val="0"/>
-              </a:spcAft>
-              <a:buNone/>
-            </a:pPr>
-            <a:r>
-              <a:rPr lang="en-US" dirty="0"/>
-              <a:t>The takeaway is the same pattern as the 8.1 .env spot-the-bug: if you don't tell the system the value is sensitive, it will treat it like any other string and print it where you don't want it printed. GitHub Secrets is the channel that knows, the same way --env-file and Railway's dashboard were the channels that knew for runtime config in 7.2 and 8.1. The masking-in-logs thing is worth showing in the UI if you have time - GHA shows `***` instead of the secret value in any log line that contains it, which is a nice second line of defense but really shouldn't be the first.</a:t>
-            </a:r>
-            <a:endParaRPr dirty="0"/>
+            <a:r>
+              <a:t>Same pattern as 8.1's .env spot-the-bug. If time, show `***` masking in UI.</a:t>
+            </a:r>
           </a:p>
         </p:txBody>
       </p:sp>
@@ -6033,20 +5386,9 @@
           </a:bodyPr>
           <a:lstStyle/>
           <a:p>
-            <a:pPr marL="0" lvl="0" indent="0" algn="l" rtl="0">
-              <a:spcBef>
-                <a:spcPts val="0"/>
-              </a:spcBef>
-              <a:spcAft>
-                <a:spcPts val="0"/>
-              </a:spcAft>
-              <a:buNone/>
-            </a:pPr>
-            <a:r>
-              <a:rPr lang="en-US" dirty="0"/>
-              <a:t>It's not extra credit, it's the thing that keeps your team functional under pressure...and it's just a lot cheaper to never break main than it is to recover from it once you have. Push your coding agent on this one too, because a lot of agents will skip branch protection unless you specifically ask for it.</a:t>
-            </a:r>
-            <a:endParaRPr dirty="0"/>
+            <a:r>
+              <a:t>Tell them: agents skip branch protection unless asked for it.</a:t>
+            </a:r>
           </a:p>
         </p:txBody>
       </p:sp>
@@ -6190,22 +5532,7 @@
             <a:noAutofit/>
           </a:bodyPr>
           <a:lstStyle/>
-          <a:p>
-            <a:pPr marL="0" lvl="0" indent="0" algn="l" rtl="0">
-              <a:spcBef>
-                <a:spcPts val="0"/>
-              </a:spcBef>
-              <a:spcAft>
-                <a:spcPts val="0"/>
-              </a:spcAft>
-              <a:buNone/>
-            </a:pPr>
-            <a:r>
-              <a:rPr lang="en-US" dirty="0"/>
-              <a:t>Pivot from the technical floor to the cultural one. Branch protection is the switch that runs in the background. PR review is the conversation that happens on top of it, and it's the half of 'shipping with confidence' that CI can't do for you.</a:t>
-            </a:r>
-            <a:endParaRPr dirty="0"/>
-          </a:p>
+          <a:p/>
         </p:txBody>
       </p:sp>
       <p:sp>
@@ -6349,20 +5676,9 @@
           </a:bodyPr>
           <a:lstStyle/>
           <a:p>
-            <a:pPr marL="0" lvl="0" indent="0" algn="l" rtl="0">
-              <a:spcBef>
-                <a:spcPts val="0"/>
-              </a:spcBef>
-              <a:spcAft>
-                <a:spcPts val="0"/>
-              </a:spcAft>
-              <a:buNone/>
-            </a:pPr>
-            <a:r>
-              <a:rPr lang="en-US" dirty="0"/>
-              <a:t>The callback structure sets up the thesis really directly. Tests on one side, deploys on the other, no glue between them...and students should feel the gap before the solution gets named. Ask the room: 'who has ever pushed code and forgotten to run the tests first?' Every hand goes up, including mine.</a:t>
-            </a:r>
-            <a:endParaRPr dirty="0"/>
+            <a:r>
+              <a:t>Ask: who's pushed code and forgotten to run tests first? Raise my hand too.</a:t>
+            </a:r>
           </a:p>
         </p:txBody>
       </p:sp>
@@ -6507,20 +5823,9 @@
           </a:bodyPr>
           <a:lstStyle/>
           <a:p>
-            <a:pPr marL="0" lvl="0" indent="0" algn="l" rtl="0">
-              <a:spcBef>
-                <a:spcPts val="0"/>
-              </a:spcBef>
-              <a:spcAft>
-                <a:spcPts val="0"/>
-              </a:spcAft>
-              <a:buNone/>
-            </a:pPr>
-            <a:r>
-              <a:rPr lang="en-US" dirty="0"/>
-              <a:t>The framing to push here: branch protection alone gives you a gate, but it's a dumb gate. It checks 'is CI green' and waves anything green through. The actual quality control is the human reading the PR - which means the PR has to be shaped so a human can actually read it, which is the next slide. The 'merge of this branch into main, not the branch alone' bullet is worth highlighting: GHA tests the merged state, which is why two PRs that both pass CI independently can still break main when both are merged. The standard fix is 'require branches to be up to date with main before merging,' which is one more checkbox in the branch protection rule.</a:t>
-            </a:r>
-            <a:endParaRPr dirty="0"/>
+            <a:r>
+              <a:t>Two green PRs can still break main together. Fix: 'require branches up to date' checkbox.</a:t>
+            </a:r>
           </a:p>
         </p:txBody>
       </p:sp>
@@ -6665,20 +5970,9 @@
           </a:bodyPr>
           <a:lstStyle/>
           <a:p>
-            <a:pPr marL="0" lvl="0" indent="0" algn="l" rtl="0">
-              <a:spcBef>
-                <a:spcPts val="0"/>
-              </a:spcBef>
-              <a:spcAft>
-                <a:spcPts val="0"/>
-              </a:spcAft>
-              <a:buNone/>
-            </a:pPr>
-            <a:r>
-              <a:rPr lang="en-US" dirty="0"/>
-              <a:t>The framing to push here: branch protection alone gives you a gate, but it's a dumb gate. It checks 'is CI green' and waves anything green through. The actual quality control is the human reading the PR - which means the PR has to be shaped so a human can actually read it, which is the next slide. The 'merge of this branch into main, not the branch alone' bullet is worth highlighting: GHA tests the merged state, which is why two PRs that both pass CI independently can still break main when both are merged. The standard fix is 'require branches to be up to date with main before merging,' which is one more checkbox in the branch protection rule.</a:t>
-            </a:r>
-            <a:endParaRPr dirty="0"/>
+            <a:r>
+              <a:t>Two green PRs can still break main together. Fix: 'require branches up to date' checkbox.</a:t>
+            </a:r>
           </a:p>
         </p:txBody>
       </p:sp>
@@ -6823,20 +6117,9 @@
           </a:bodyPr>
           <a:lstStyle/>
           <a:p>
-            <a:pPr marL="0" lvl="0" indent="0" algn="l" rtl="0">
-              <a:spcBef>
-                <a:spcPts val="0"/>
-              </a:spcBef>
-              <a:spcAft>
-                <a:spcPts val="0"/>
-              </a:spcAft>
-              <a:buNone/>
-            </a:pPr>
-            <a:r>
-              <a:rPr lang="en-US" dirty="0"/>
-              <a:t>The four shape rules are really just 'make the PR cheap to review.' Small + scoped means the reviewer can hold the whole diff in their head. Described means they don't have to reverse-engineer your intent. Green means they're not wasting their time looking at broken code. Each one is individually small, all four together change a team's review culture entirely. The 'especially your own' bit is the one to land hard - a PR you opened against yourself is still useful because it forces you to look at your own diff with fresh eyes before it hits main, which catches a surprising amount of dumb stuff. And on a 3-person team it gives the other two a real chance to flag issues they'd otherwise only discover after the fact.</a:t>
-            </a:r>
-            <a:endParaRPr dirty="0"/>
+            <a:r>
+              <a:t>Self-review of your own PR catches dumb stuff too.</a:t>
+            </a:r>
           </a:p>
         </p:txBody>
       </p:sp>
@@ -6981,20 +6264,9 @@
           </a:bodyPr>
           <a:lstStyle/>
           <a:p>
-            <a:pPr marL="0" lvl="0" indent="0" algn="l" rtl="0">
-              <a:spcBef>
-                <a:spcPts val="0"/>
-              </a:spcBef>
-              <a:spcAft>
-                <a:spcPts val="0"/>
-              </a:spcAft>
-              <a:buNone/>
-            </a:pPr>
-            <a:r>
-              <a:rPr lang="en-US" dirty="0"/>
-              <a:t>The four shape rules are really just 'make the PR cheap to review.' Small + scoped means the reviewer can hold the whole diff in their head. Described means they don't have to reverse-engineer your intent. Green means they're not wasting their time looking at broken code. Each one is individually small, all four together change a team's review culture entirely. The 'especially your own' bit is the one to land hard - a PR you opened against yourself is still useful because it forces you to look at your own diff with fresh eyes before it hits main, which catches a surprising amount of dumb stuff. And on a 3-person team it gives the other two a real chance to flag issues they'd otherwise only discover after the fact.</a:t>
-            </a:r>
-            <a:endParaRPr dirty="0"/>
+            <a:r>
+              <a:t>Self-review of your own PR catches dumb stuff too.</a:t>
+            </a:r>
           </a:p>
         </p:txBody>
       </p:sp>
@@ -7139,20 +6411,9 @@
           </a:bodyPr>
           <a:lstStyle/>
           <a:p>
-            <a:pPr marL="0" lvl="0" indent="0" algn="l" rtl="0">
-              <a:spcBef>
-                <a:spcPts val="0"/>
-              </a:spcBef>
-              <a:spcAft>
-                <a:spcPts val="0"/>
-              </a:spcAft>
-              <a:buNone/>
-            </a:pPr>
-            <a:r>
-              <a:rPr lang="en-US" dirty="0"/>
-              <a:t>The four shape rules are really just 'make the PR cheap to review.' Small + scoped means the reviewer can hold the whole diff in their head. Described means they don't have to reverse-engineer your intent. Green means they're not wasting their time looking at broken code. Each one is individually small, all four together change a team's review culture entirely. The 'especially your own' bit is the one to land hard - a PR you opened against yourself is still useful because it forces you to look at your own diff with fresh eyes before it hits main, which catches a surprising amount of dumb stuff. And on a 3-person team it gives the other two a real chance to flag issues they'd otherwise only discover after the fact.</a:t>
-            </a:r>
-            <a:endParaRPr dirty="0"/>
+            <a:r>
+              <a:t>Self-review of your own PR catches dumb stuff too.</a:t>
+            </a:r>
           </a:p>
         </p:txBody>
       </p:sp>
@@ -7297,20 +6558,9 @@
           </a:bodyPr>
           <a:lstStyle/>
           <a:p>
-            <a:pPr marL="0" lvl="0" indent="0" algn="l" rtl="0">
-              <a:spcBef>
-                <a:spcPts val="0"/>
-              </a:spcBef>
-              <a:spcAft>
-                <a:spcPts val="0"/>
-              </a:spcAft>
-              <a:buNone/>
-            </a:pPr>
-            <a:r>
-              <a:rPr lang="en-US" dirty="0"/>
-              <a:t>The four shape rules are really just 'make the PR cheap to review.' Small + scoped means the reviewer can hold the whole diff in their head. Described means they don't have to reverse-engineer your intent. Green means they're not wasting their time looking at broken code. Each one is individually small, all four together change a team's review culture entirely. The 'especially your own' bit is the one to land hard - a PR you opened against yourself is still useful because it forces you to look at your own diff with fresh eyes before it hits main, which catches a surprising amount of dumb stuff. And on a 3-person team it gives the other two a real chance to flag issues they'd otherwise only discover after the fact.</a:t>
-            </a:r>
-            <a:endParaRPr dirty="0"/>
+            <a:r>
+              <a:t>Self-review of your own PR catches dumb stuff too.</a:t>
+            </a:r>
           </a:p>
         </p:txBody>
       </p:sp>
@@ -7455,20 +6705,9 @@
           </a:bodyPr>
           <a:lstStyle/>
           <a:p>
-            <a:pPr marL="0" lvl="0" indent="0" algn="l" rtl="0">
-              <a:spcBef>
-                <a:spcPts val="0"/>
-              </a:spcBef>
-              <a:spcAft>
-                <a:spcPts val="0"/>
-              </a:spcAft>
-              <a:buNone/>
-            </a:pPr>
-            <a:r>
-              <a:rPr lang="en-US" dirty="0"/>
-              <a:t>The four shape rules are really just 'make the PR cheap to review.' Small + scoped means the reviewer can hold the whole diff in their head. Described means they don't have to reverse-engineer your intent. Green means they're not wasting their time looking at broken code. Each one is individually small, all four together change a team's review culture entirely. The 'especially your own' bit is the one to land hard - a PR you opened against yourself is still useful because it forces you to look at your own diff with fresh eyes before it hits main, which catches a surprising amount of dumb stuff. And on a 3-person team it gives the other two a real chance to flag issues they'd otherwise only discover after the fact.</a:t>
-            </a:r>
-            <a:endParaRPr dirty="0"/>
+            <a:r>
+              <a:t>Self-review of your own PR catches dumb stuff too.</a:t>
+            </a:r>
           </a:p>
         </p:txBody>
       </p:sp>
@@ -7612,262 +6851,7 @@
             <a:noAutofit/>
           </a:bodyPr>
           <a:lstStyle/>
-          <a:p>
-            <a:pPr marL="0" lvl="0" indent="0" algn="l" rtl="0">
-              <a:spcBef>
-                <a:spcPts val="0"/>
-              </a:spcBef>
-              <a:spcAft>
-                <a:spcPts val="0"/>
-              </a:spcAft>
-              <a:buNone/>
-            </a:pPr>
-            <a:r>
-              <a:rPr lang="en-US" dirty="0"/>
-              <a:t>name: Tests</a:t>
-            </a:r>
-            <a:endParaRPr dirty="0"/>
-          </a:p>
-          <a:p>
-            <a:pPr marL="0" lvl="0" indent="0" algn="l" rtl="0">
-              <a:spcBef>
-                <a:spcPts val="0"/>
-              </a:spcBef>
-              <a:spcAft>
-                <a:spcPts val="0"/>
-              </a:spcAft>
-              <a:buNone/>
-            </a:pPr>
-            <a:endParaRPr dirty="0"/>
-          </a:p>
-          <a:p>
-            <a:pPr marL="0" lvl="0" indent="0" algn="l" rtl="0">
-              <a:spcBef>
-                <a:spcPts val="0"/>
-              </a:spcBef>
-              <a:spcAft>
-                <a:spcPts val="0"/>
-              </a:spcAft>
-              <a:buNone/>
-            </a:pPr>
-            <a:r>
-              <a:rPr lang="en-US" dirty="0"/>
-              <a:t>on: [push, </a:t>
-            </a:r>
-            <a:r>
-              <a:rPr lang="en-US" dirty="0" err="1"/>
-              <a:t>pull_request</a:t>
-            </a:r>
-            <a:r>
-              <a:rPr lang="en-US" dirty="0"/>
-              <a:t>]</a:t>
-            </a:r>
-            <a:endParaRPr dirty="0"/>
-          </a:p>
-          <a:p>
-            <a:pPr marL="0" lvl="0" indent="0" algn="l" rtl="0">
-              <a:spcBef>
-                <a:spcPts val="0"/>
-              </a:spcBef>
-              <a:spcAft>
-                <a:spcPts val="0"/>
-              </a:spcAft>
-              <a:buNone/>
-            </a:pPr>
-            <a:endParaRPr dirty="0"/>
-          </a:p>
-          <a:p>
-            <a:pPr marL="0" lvl="0" indent="0" algn="l" rtl="0">
-              <a:spcBef>
-                <a:spcPts val="0"/>
-              </a:spcBef>
-              <a:spcAft>
-                <a:spcPts val="0"/>
-              </a:spcAft>
-              <a:buNone/>
-            </a:pPr>
-            <a:r>
-              <a:rPr lang="en-US" dirty="0"/>
-              <a:t>jobs:</a:t>
-            </a:r>
-            <a:endParaRPr dirty="0"/>
-          </a:p>
-          <a:p>
-            <a:pPr marL="0" lvl="0" indent="0" algn="l" rtl="0">
-              <a:spcBef>
-                <a:spcPts val="0"/>
-              </a:spcBef>
-              <a:spcAft>
-                <a:spcPts val="0"/>
-              </a:spcAft>
-              <a:buNone/>
-            </a:pPr>
-            <a:r>
-              <a:rPr lang="en-US" dirty="0"/>
-              <a:t>  test:</a:t>
-            </a:r>
-            <a:endParaRPr dirty="0"/>
-          </a:p>
-          <a:p>
-            <a:pPr marL="0" lvl="0" indent="0" algn="l" rtl="0">
-              <a:spcBef>
-                <a:spcPts val="0"/>
-              </a:spcBef>
-              <a:spcAft>
-                <a:spcPts val="0"/>
-              </a:spcAft>
-              <a:buNone/>
-            </a:pPr>
-            <a:r>
-              <a:rPr lang="en-US" dirty="0"/>
-              <a:t>    runs-on: ubuntu-latest</a:t>
-            </a:r>
-            <a:endParaRPr dirty="0"/>
-          </a:p>
-          <a:p>
-            <a:pPr marL="0" lvl="0" indent="0" algn="l" rtl="0">
-              <a:spcBef>
-                <a:spcPts val="0"/>
-              </a:spcBef>
-              <a:spcAft>
-                <a:spcPts val="0"/>
-              </a:spcAft>
-              <a:buNone/>
-            </a:pPr>
-            <a:r>
-              <a:rPr lang="en-US" dirty="0"/>
-              <a:t>    steps:</a:t>
-            </a:r>
-            <a:endParaRPr dirty="0"/>
-          </a:p>
-          <a:p>
-            <a:pPr marL="0" lvl="0" indent="0" algn="l" rtl="0">
-              <a:spcBef>
-                <a:spcPts val="0"/>
-              </a:spcBef>
-              <a:spcAft>
-                <a:spcPts val="0"/>
-              </a:spcAft>
-              <a:buNone/>
-            </a:pPr>
-            <a:r>
-              <a:rPr lang="en-US" dirty="0"/>
-              <a:t>      - uses: actions/checkout@v6</a:t>
-            </a:r>
-            <a:endParaRPr dirty="0"/>
-          </a:p>
-          <a:p>
-            <a:pPr marL="0" lvl="0" indent="0" algn="l" rtl="0">
-              <a:spcBef>
-                <a:spcPts val="0"/>
-              </a:spcBef>
-              <a:spcAft>
-                <a:spcPts val="0"/>
-              </a:spcAft>
-              <a:buNone/>
-            </a:pPr>
-            <a:r>
-              <a:rPr lang="en-US" dirty="0"/>
-              <a:t>      - uses: actions/setup-python@v6</a:t>
-            </a:r>
-            <a:endParaRPr dirty="0"/>
-          </a:p>
-          <a:p>
-            <a:pPr marL="0" lvl="0" indent="0" algn="l" rtl="0">
-              <a:spcBef>
-                <a:spcPts val="0"/>
-              </a:spcBef>
-              <a:spcAft>
-                <a:spcPts val="0"/>
-              </a:spcAft>
-              <a:buNone/>
-            </a:pPr>
-            <a:r>
-              <a:rPr lang="en-US" dirty="0"/>
-              <a:t>        with:</a:t>
-            </a:r>
-            <a:endParaRPr dirty="0"/>
-          </a:p>
-          <a:p>
-            <a:pPr marL="0" lvl="0" indent="0" algn="l" rtl="0">
-              <a:spcBef>
-                <a:spcPts val="0"/>
-              </a:spcBef>
-              <a:spcAft>
-                <a:spcPts val="0"/>
-              </a:spcAft>
-              <a:buNone/>
-            </a:pPr>
-            <a:r>
-              <a:rPr lang="en-US" dirty="0"/>
-              <a:t>          python-version: "3.12"</a:t>
-            </a:r>
-            <a:endParaRPr dirty="0"/>
-          </a:p>
-          <a:p>
-            <a:pPr marL="0" lvl="0" indent="0" algn="l" rtl="0">
-              <a:spcBef>
-                <a:spcPts val="0"/>
-              </a:spcBef>
-              <a:spcAft>
-                <a:spcPts val="0"/>
-              </a:spcAft>
-              <a:buNone/>
-            </a:pPr>
-            <a:endParaRPr dirty="0"/>
-          </a:p>
-          <a:p>
-            <a:pPr marL="0" lvl="0" indent="0" algn="l" rtl="0">
-              <a:spcBef>
-                <a:spcPts val="0"/>
-              </a:spcBef>
-              <a:spcAft>
-                <a:spcPts val="0"/>
-              </a:spcAft>
-              <a:buNone/>
-            </a:pPr>
-            <a:r>
-              <a:rPr lang="en-US" dirty="0"/>
-              <a:t>      - run: pip install -r </a:t>
-            </a:r>
-            <a:r>
-              <a:rPr lang="en-US" dirty="0" err="1"/>
-              <a:t>requirements.txt</a:t>
-            </a:r>
-            <a:endParaRPr dirty="0"/>
-          </a:p>
-          <a:p>
-            <a:pPr marL="0" lvl="0" indent="0" algn="l" rtl="0">
-              <a:spcBef>
-                <a:spcPts val="0"/>
-              </a:spcBef>
-              <a:spcAft>
-                <a:spcPts val="0"/>
-              </a:spcAft>
-              <a:buNone/>
-            </a:pPr>
-            <a:r>
-              <a:rPr lang="en-US" dirty="0"/>
-              <a:t>      - run: </a:t>
-            </a:r>
-            <a:r>
-              <a:rPr lang="en-US" dirty="0" err="1"/>
-              <a:t>pytest</a:t>
-            </a:r>
-            <a:endParaRPr dirty="0"/>
-          </a:p>
-          <a:p>
-            <a:pPr marL="0" lvl="0" indent="0" algn="l" rtl="0">
-              <a:spcBef>
-                <a:spcPts val="0"/>
-              </a:spcBef>
-              <a:spcAft>
-                <a:spcPts val="0"/>
-              </a:spcAft>
-              <a:buNone/>
-            </a:pPr>
-            <a:endParaRPr dirty="0"/>
-          </a:p>
+          <a:p/>
         </p:txBody>
       </p:sp>
       <p:sp>
@@ -8164,54 +7148,7 @@
             <a:noAutofit/>
           </a:bodyPr>
           <a:lstStyle/>
-          <a:p>
-            <a:pPr marL="0" lvl="0" indent="0" algn="l" rtl="0">
-              <a:spcBef>
-                <a:spcPts val="0"/>
-              </a:spcBef>
-              <a:spcAft>
-                <a:spcPts val="0"/>
-              </a:spcAft>
-              <a:buNone/>
-            </a:pPr>
-            <a:r>
-              <a:rPr lang="en-US" dirty="0"/>
-              <a:t>Same shape as every other job - checkout, set up Python, install, run the tool. Pyright here is the type checker, but anything deterministic with a command-line entry point and a meaningful exit code can be its own job, and jobs run in parallel on separate VMs, so extra checks are basically free.</a:t>
-            </a:r>
-            <a:r>
-              <a:rPr lang="en-US" dirty="0" err="1"/>
-              <a:t/>
-            </a:r>
-            <a:r>
-              <a:rPr lang="en-US" dirty="0"/>
-              <a:t/>
-            </a:r>
-            <a:r>
-              <a:rPr lang="en-US" dirty="0" err="1"/>
-              <a:t/>
-            </a:r>
-            <a:r>
-              <a:rPr lang="en-US" dirty="0"/>
-              <a:t/>
-            </a:r>
-            <a:r>
-              <a:rPr lang="en-US" dirty="0" err="1"/>
-              <a:t/>
-            </a:r>
-            <a:r>
-              <a:rPr lang="en-US" dirty="0"/>
-              <a:t/>
-            </a:r>
-            <a:r>
-              <a:rPr lang="en-US" dirty="0" err="1"/>
-              <a:t/>
-            </a:r>
-            <a:r>
-              <a:rPr lang="en-US" dirty="0"/>
-              <a:t/>
-            </a:r>
-            <a:endParaRPr dirty="0"/>
-          </a:p>
+          <a:p/>
         </p:txBody>
       </p:sp>
       <p:sp>
@@ -8354,22 +7291,7 @@
             <a:noAutofit/>
           </a:bodyPr>
           <a:lstStyle/>
-          <a:p>
-            <a:pPr marL="0" lvl="0" indent="0" algn="l" rtl="0">
-              <a:spcBef>
-                <a:spcPts val="0"/>
-              </a:spcBef>
-              <a:spcAft>
-                <a:spcPts val="0"/>
-              </a:spcAft>
-              <a:buNone/>
-            </a:pPr>
-            <a:r>
-              <a:rPr lang="en-US" dirty="0"/>
-              <a:t>Students really do need to feel the inevitability here. It's not a hypothetical, it's the kind of thing that tends to catch a team out sooner or later, often right around when everyone's getting comfortable and starts skipping the test run. Telling people to try harder to remember has never worked for any engineer ever...so the fix has to be taking the chore away from humans entirely.</a:t>
-            </a:r>
-            <a:endParaRPr dirty="0"/>
-          </a:p>
+          <a:p/>
         </p:txBody>
       </p:sp>
       <p:sp>
@@ -8513,20 +7435,9 @@
           </a:bodyPr>
           <a:lstStyle/>
           <a:p>
-            <a:pPr marL="0" lvl="0" indent="0" algn="l" rtl="0">
-              <a:spcBef>
-                <a:spcPts val="0"/>
-              </a:spcBef>
-              <a:spcAft>
-                <a:spcPts val="0"/>
-              </a:spcAft>
-              <a:buNone/>
-            </a:pPr>
-            <a:r>
-              <a:rPr lang="en-US"/>
-              <a:t>Walk through each answer, and then really point at the final comment block. The second step - turning on branch protection - is the one that actually makes CI valuable in the first place. Having the workflow without the branch protection rule is kinda like having a lock you never turn...technically installed, practically useless.</a:t>
-            </a:r>
-            <a:endParaRPr/>
+            <a:r>
+              <a:t>Point at the final comment block: branch protection is the step that matters.</a:t>
+            </a:r>
           </a:p>
         </p:txBody>
       </p:sp>
@@ -8671,20 +7582,9 @@
           </a:bodyPr>
           <a:lstStyle/>
           <a:p>
-            <a:pPr marL="0" lvl="0" indent="0" algn="l" rtl="0">
-              <a:spcBef>
-                <a:spcPts val="0"/>
-              </a:spcBef>
-              <a:spcAft>
-                <a:spcPts val="0"/>
-              </a:spcAft>
-              <a:buNone/>
-            </a:pPr>
-            <a:r>
-              <a:rPr lang="en-US" dirty="0"/>
-              <a:t>Four-point recap rather than three - the deck is bigger now, the new pieces are CI as a place for more than tests (lint slides), the PR review half (Section 5), and secrets-as-a-channel (the spot-the-bug). The action item is still branch protection on day one because it's the only thing in here that's a single toggle in the UI. Concurrency next class is a real gear-shift from these practical deploy lectures - worth flagging so students know to bring a different kind of attention.</a:t>
-            </a:r>
-            <a:endParaRPr dirty="0"/>
+            <a:r>
+              <a:t>Warn: next class on concurrency is a different kind of material.</a:t>
+            </a:r>
           </a:p>
         </p:txBody>
       </p:sp>
@@ -9309,20 +8209,9 @@
           </a:bodyPr>
           <a:lstStyle/>
           <a:p>
-            <a:pPr marL="0" lvl="0" indent="0" algn="l" rtl="0">
-              <a:spcBef>
-                <a:spcPts val="0"/>
-              </a:spcBef>
-              <a:spcAft>
-                <a:spcPts val="0"/>
-              </a:spcAft>
-              <a:buNone/>
-            </a:pPr>
-            <a:r>
-              <a:rPr lang="en-US" dirty="0"/>
-              <a:t>The value prop is really just 'take the chore away from humans.' The green check / red X next to commits is the thing students will see in the UI and intuitively get - CI makes test results visible in the same place the code lives. The blocked-merge feature is the one that actually changes team behavior, which is why we spend the back half of the lecture on it.</a:t>
-            </a:r>
-            <a:endParaRPr dirty="0"/>
+            <a:r>
+              <a:t>Blocked merge: the back half of today.</a:t>
+            </a:r>
           </a:p>
         </p:txBody>
       </p:sp>

--- a/lectures/Lecture 8.2 - Continuous Integration.pptx
+++ b/lectures/Lecture 8.2 - Continuous Integration.pptx
@@ -6852,6 +6852,69 @@
           </a:bodyPr>
           <a:lstStyle/>
           <a:p/>
+          <a:p>
+            <a:r>
+              <a:t>name: Tests</a:t>
+            </a:r>
+          </a:p>
+          <a:p/>
+          <a:p>
+            <a:r>
+              <a:t>on: [push, pull_request]</a:t>
+            </a:r>
+          </a:p>
+          <a:p/>
+          <a:p>
+            <a:r>
+              <a:t>jobs:</a:t>
+            </a:r>
+          </a:p>
+          <a:p>
+            <a:r>
+              <a:t>  test:</a:t>
+            </a:r>
+          </a:p>
+          <a:p>
+            <a:r>
+              <a:t>    runs-on: ubuntu-latest</a:t>
+            </a:r>
+          </a:p>
+          <a:p>
+            <a:r>
+              <a:t>    steps:</a:t>
+            </a:r>
+          </a:p>
+          <a:p>
+            <a:r>
+              <a:t>      - uses: actions/checkout@v6</a:t>
+            </a:r>
+          </a:p>
+          <a:p>
+            <a:r>
+              <a:t>      - uses: actions/setup-python@v6</a:t>
+            </a:r>
+          </a:p>
+          <a:p>
+            <a:r>
+              <a:t>        with:</a:t>
+            </a:r>
+          </a:p>
+          <a:p>
+            <a:r>
+              <a:t>          python-version: "3.12"</a:t>
+            </a:r>
+          </a:p>
+          <a:p/>
+          <a:p>
+            <a:r>
+              <a:t>      - run: pip install -r requirements.txt</a:t>
+            </a:r>
+          </a:p>
+          <a:p>
+            <a:r>
+              <a:t>      - run: pytest</a:t>
+            </a:r>
+          </a:p>
         </p:txBody>
       </p:sp>
       <p:sp>
